--- a/1-Na_Descriptors/ARIS_Experiments/new_descriptors/automat-naconductor/presentation/两代描述符筛选阶段性汇报_ppt169_20260815/exports/两代描述符筛选阶段性汇报_20260817_154312.pptx
+++ b/1-Na_Descriptors/ARIS_Experiments/new_descriptors/automat-naconductor/presentation/两代描述符筛选阶段性汇报_ppt169_20260815/exports/两代描述符筛选阶段性汇报_20260817_154312.pptx
@@ -7663,10 +7663,10 @@
                   <a:ea typeface="+mn-ea"/>
                   <a:cs typeface="+mn-cs"/>
                 </a:rPr>
-                <a:t>解决</a:t>
-              </a:r>
-              <a:r>
-                <a:rPr lang="zh-CN" sz="1350" b="1">
+                <a:t>解决不了，</a:t>
+              </a:r>
+              <a:r>
+                <a:rPr lang="zh-CN" altLang="en-US" sz="1350" b="1" dirty="0">
                   <a:solidFill>
                     <a:schemeClr val="accent1"/>
                   </a:solidFill>
@@ -7674,34 +7674,15 @@
                   <a:ea typeface="+mn-ea"/>
                   <a:cs typeface="+mn-cs"/>
                 </a:rPr>
-                <a:t>不了，</a:t>
-              </a:r>
-              <a:r>
-                <a:rPr lang="zh-CN" altLang="en-US" sz="1350" b="1">
+                <a:t>需要</a:t>
+              </a:r>
+              <a:r>
+                <a:rPr lang="zh-CN" altLang="en-US" sz="1350" b="1" dirty="0">
                   <a:solidFill>
                     <a:schemeClr val="accent1"/>
                   </a:solidFill>
-                  <a:latin typeface="+mn-lt"/>
-                  <a:ea typeface="+mn-ea"/>
-                  <a:cs typeface="+mn-cs"/>
-                </a:rPr>
-                <a:t>需要</a:t>
-              </a:r>
-              <a:r>
-                <a:rPr lang="zh-CN" altLang="en-US" sz="1350" b="1">
-                  <a:solidFill>
-                    <a:schemeClr val="accent1"/>
-                  </a:solidFill>
-                </a:rPr>
-                <a:t>添加</a:t>
-              </a:r>
-              <a:r>
-                <a:rPr lang="zh-CN" altLang="en-US" sz="1350" b="1" dirty="0">
-                  <a:solidFill>
-                    <a:schemeClr val="accent1"/>
-                  </a:solidFill>
-                </a:rPr>
-                <a:t>新的</a:t>
+                </a:rPr>
+                <a:t>添加新的</a:t>
               </a:r>
               <a:r>
                 <a:rPr lang="zh-CN" sz="1350" b="1" dirty="0">
@@ -7988,9 +7969,9 @@
         <p:grpSpPr>
           <a:xfrm>
             <a:off x="441198" y="463868"/>
-            <a:ext cx="11293602" cy="993267"/>
+            <a:ext cx="11293602" cy="955357"/>
             <a:chOff x="441198" y="463868"/>
-            <a:chExt cx="11293602" cy="993267"/>
+            <a:chExt cx="11293602" cy="955357"/>
           </a:xfrm>
         </p:grpSpPr>
         <p:sp>
@@ -8042,7 +8023,7 @@
           <p:spPr>
             <a:xfrm>
               <a:off x="441198" y="841058"/>
-              <a:ext cx="5677510" cy="616077"/>
+              <a:ext cx="1622239" cy="484748"/>
             </a:xfrm>
             <a:prstGeom prst="rect">
               <a:avLst/>
@@ -8068,8 +8049,27 @@
                   <a:ea typeface="+mj-ea"/>
                   <a:cs typeface="+mj-cs"/>
                 </a:rPr>
-                <a:t>第二代怎么解决这五个问题</a:t>
-              </a:r>
+                <a:t>解决</a:t>
+              </a:r>
+              <a:r>
+                <a:rPr lang="zh-CN" altLang="en-US" sz="3150" b="1" dirty="0">
+                  <a:solidFill>
+                    <a:schemeClr val="accent1"/>
+                  </a:solidFill>
+                  <a:latin typeface="+mj-lt"/>
+                  <a:ea typeface="+mj-ea"/>
+                  <a:cs typeface="+mj-cs"/>
+                </a:rPr>
+                <a:t>办法</a:t>
+              </a:r>
+              <a:endParaRPr lang="zh-CN" sz="3150" b="1" dirty="0">
+                <a:solidFill>
+                  <a:schemeClr val="accent1"/>
+                </a:solidFill>
+                <a:latin typeface="+mj-lt"/>
+                <a:ea typeface="+mj-ea"/>
+                <a:cs typeface="+mj-cs"/>
+              </a:endParaRPr>
             </a:p>
           </p:txBody>
         </p:sp>
@@ -8112,68 +8112,13 @@
       </p:grpSp>
       <p:grpSp>
         <p:nvGrpSpPr>
-          <p:cNvPr id="7" name="Group 7"/>
-          <p:cNvGrpSpPr/>
-          <p:nvPr/>
-        </p:nvGrpSpPr>
-        <p:grpSpPr>
-          <a:xfrm>
-            <a:off x="449580" y="1704975"/>
-            <a:ext cx="9304020" cy="293370"/>
-            <a:chOff x="449580" y="1704975"/>
-            <a:chExt cx="9304020" cy="293370"/>
-          </a:xfrm>
-        </p:grpSpPr>
-        <p:sp>
-          <p:nvSpPr>
-            <p:cNvPr id="6" name="TextBox 6"/>
-            <p:cNvSpPr txBox="1"/>
-            <p:nvPr/>
-          </p:nvSpPr>
-          <p:spPr>
-            <a:xfrm>
-              <a:off x="449580" y="1704975"/>
-              <a:ext cx="9304020" cy="293370"/>
-            </a:xfrm>
-            <a:prstGeom prst="rect">
-              <a:avLst/>
-            </a:prstGeom>
-            <a:noFill/>
-            <a:ln>
-              <a:noFill/>
-            </a:ln>
-          </p:spPr>
-          <p:txBody>
-            <a:bodyPr wrap="none" lIns="0" tIns="0" rIns="0" bIns="0" anchor="t" anchorCtr="0">
-              <a:spAutoFit/>
-            </a:bodyPr>
-            <a:lstStyle/>
-            <a:p>
-              <a:pPr algn="l"/>
-              <a:r>
-                <a:rPr lang="zh-CN" sz="1500" dirty="0">
-                  <a:solidFill>
-                    <a:schemeClr val="dk1"/>
-                  </a:solidFill>
-                  <a:latin typeface="+mn-lt"/>
-                  <a:ea typeface="+mn-ea"/>
-                  <a:cs typeface="+mn-cs"/>
-                </a:rPr>
-                <a:t>直接对着上一页五个问题，一个一个处理；这张表说的是打算怎么做、做到哪一步，不是已经跑出结果。</a:t>
-              </a:r>
-            </a:p>
-          </p:txBody>
-        </p:sp>
-      </p:grpSp>
-      <p:grpSp>
-        <p:nvGrpSpPr>
           <p:cNvPr id="48" name="Group 48"/>
           <p:cNvGrpSpPr/>
           <p:nvPr/>
         </p:nvGrpSpPr>
         <p:grpSpPr>
           <a:xfrm>
-            <a:off x="457200" y="2057400"/>
+            <a:off x="457200" y="1749742"/>
             <a:ext cx="11277600" cy="3619500"/>
             <a:chOff x="457200" y="2057400"/>
             <a:chExt cx="11277600" cy="3619500"/>
@@ -8537,102 +8482,54 @@
         </p:sp>
         <p:sp>
           <p:nvSpPr>
-            <p:cNvPr id="18" name="TextBox 18"/>
-            <p:cNvSpPr txBox="1"/>
-            <p:nvPr/>
-          </p:nvSpPr>
-          <p:spPr>
-            <a:xfrm>
-              <a:off x="8223504" y="2575560"/>
-              <a:ext cx="496824" cy="234696"/>
-            </a:xfrm>
-            <a:prstGeom prst="rect">
-              <a:avLst/>
-            </a:prstGeom>
-            <a:noFill/>
-            <a:ln>
-              <a:noFill/>
-            </a:ln>
-          </p:spPr>
-          <p:txBody>
-            <a:bodyPr wrap="none" lIns="0" tIns="0" rIns="0" bIns="0" anchor="t" anchorCtr="0">
-              <a:spAutoFit/>
-            </a:bodyPr>
-            <a:lstStyle/>
-            <a:p>
-              <a:pPr algn="l"/>
-              <a:r>
-                <a:rPr lang="zh-CN" sz="1200" dirty="0">
+            <p:cNvPr id="19" name="TextBox 19"/>
+            <p:cNvSpPr txBox="1"/>
+            <p:nvPr/>
+          </p:nvSpPr>
+          <p:spPr>
+            <a:xfrm>
+              <a:off x="8224331" y="2665154"/>
+              <a:ext cx="3095399" cy="184666"/>
+            </a:xfrm>
+            <a:prstGeom prst="rect">
+              <a:avLst/>
+            </a:prstGeom>
+            <a:noFill/>
+            <a:ln>
+              <a:noFill/>
+            </a:ln>
+          </p:spPr>
+          <p:txBody>
+            <a:bodyPr wrap="none" lIns="0" tIns="0" rIns="0" bIns="0" anchor="t" anchorCtr="0">
+              <a:spAutoFit/>
+            </a:bodyPr>
+            <a:lstStyle/>
+            <a:p>
+              <a:pPr algn="l"/>
+              <a:r>
+                <a:rPr lang="zh-CN" altLang="en-US" sz="1200" dirty="0">
                   <a:solidFill>
                     <a:schemeClr val="accent3"/>
                   </a:solidFill>
-                  <a:latin typeface="+mn-lt"/>
-                  <a:ea typeface="+mn-ea"/>
-                  <a:cs typeface="+mn-cs"/>
-                </a:rPr>
-                <a:t>已实现</a:t>
-              </a:r>
-            </a:p>
-          </p:txBody>
-        </p:sp>
-        <p:sp>
-          <p:nvSpPr>
-            <p:cNvPr id="19" name="TextBox 19"/>
-            <p:cNvSpPr txBox="1"/>
-            <p:nvPr/>
-          </p:nvSpPr>
-          <p:spPr>
-            <a:xfrm>
-              <a:off x="8224266" y="2820352"/>
-              <a:ext cx="2723502" cy="161583"/>
-            </a:xfrm>
-            <a:prstGeom prst="rect">
-              <a:avLst/>
-            </a:prstGeom>
-            <a:noFill/>
-            <a:ln>
-              <a:noFill/>
-            </a:ln>
-          </p:spPr>
-          <p:txBody>
-            <a:bodyPr wrap="none" lIns="0" tIns="0" rIns="0" bIns="0" anchor="t" anchorCtr="0">
-              <a:spAutoFit/>
-            </a:bodyPr>
-            <a:lstStyle/>
-            <a:p>
-              <a:pPr algn="l"/>
-              <a:r>
-                <a:rPr lang="zh-CN" altLang="en-US" sz="1050" dirty="0">
-                  <a:solidFill>
-                    <a:schemeClr val="accent6"/>
-                  </a:solidFill>
                 </a:rPr>
                 <a:t>能做到分辨出这是 </a:t>
               </a:r>
               <a:r>
-                <a:rPr lang="en-US" altLang="zh-CN" sz="1050" dirty="0">
-                  <a:solidFill>
-                    <a:schemeClr val="accent6"/>
+                <a:rPr lang="en-US" altLang="zh-CN" sz="1200" dirty="0">
+                  <a:solidFill>
+                    <a:schemeClr val="accent3"/>
                   </a:solidFill>
                 </a:rPr>
                 <a:t>NASICON </a:t>
               </a:r>
               <a:r>
-                <a:rPr lang="zh-CN" altLang="en-US" sz="1050" dirty="0">
-                  <a:solidFill>
-                    <a:schemeClr val="accent6"/>
+                <a:rPr lang="zh-CN" altLang="en-US" sz="1200" dirty="0">
+                  <a:solidFill>
+                    <a:schemeClr val="accent3"/>
                   </a:solidFill>
                 </a:rPr>
                 <a:t>导致拿到高分的</a:t>
               </a:r>
-              <a:endParaRPr lang="zh-CN" sz="1050" dirty="0">
-                <a:solidFill>
-                  <a:schemeClr val="accent6"/>
-                </a:solidFill>
-                <a:latin typeface="+mn-lt"/>
-                <a:ea typeface="+mn-ea"/>
-                <a:cs typeface="+mn-cs"/>
-              </a:endParaRPr>
             </a:p>
           </p:txBody>
         </p:sp>
@@ -8879,31 +8776,28 @@
           <p:spPr>
             <a:xfrm>
               <a:off x="8224266" y="3468052"/>
-              <a:ext cx="1706880" cy="205359"/>
-            </a:xfrm>
-            <a:prstGeom prst="rect">
-              <a:avLst/>
-            </a:prstGeom>
-            <a:noFill/>
-            <a:ln>
-              <a:noFill/>
-            </a:ln>
-          </p:spPr>
-          <p:txBody>
-            <a:bodyPr wrap="none" lIns="0" tIns="0" rIns="0" bIns="0" anchor="t" anchorCtr="0">
-              <a:spAutoFit/>
-            </a:bodyPr>
-            <a:lstStyle/>
-            <a:p>
-              <a:pPr algn="l"/>
-              <a:r>
-                <a:rPr lang="zh-CN" sz="1050" dirty="0">
-                  <a:solidFill>
-                    <a:schemeClr val="accent6"/>
-                  </a:solidFill>
-                  <a:latin typeface="+mn-lt"/>
-                  <a:ea typeface="+mn-ea"/>
-                  <a:cs typeface="+mn-cs"/>
+              <a:ext cx="1846659" cy="184666"/>
+            </a:xfrm>
+            <a:prstGeom prst="rect">
+              <a:avLst/>
+            </a:prstGeom>
+            <a:noFill/>
+            <a:ln>
+              <a:noFill/>
+            </a:ln>
+          </p:spPr>
+          <p:txBody>
+            <a:bodyPr wrap="none" lIns="0" tIns="0" rIns="0" bIns="0" anchor="t" anchorCtr="0">
+              <a:spAutoFit/>
+            </a:bodyPr>
+            <a:lstStyle/>
+            <a:p>
+              <a:pPr algn="l"/>
+              <a:r>
+                <a:rPr lang="zh-CN" altLang="en-US" sz="1200" dirty="0">
+                  <a:solidFill>
+                    <a:schemeClr val="accent3"/>
+                  </a:solidFill>
                 </a:rPr>
                 <a:t>体系分类枚举值待人工填定</a:t>
               </a:r>
@@ -8976,8 +8870,8 @@
           </p:nvSpPr>
           <p:spPr>
             <a:xfrm>
-              <a:off x="603123" y="3862864"/>
-              <a:ext cx="1453924" cy="196977"/>
+              <a:off x="603123" y="3954399"/>
+              <a:ext cx="1843453" cy="196977"/>
             </a:xfrm>
             <a:prstGeom prst="rect">
               <a:avLst/>
@@ -9003,31 +8897,26 @@
                   <a:ea typeface="+mn-ea"/>
                   <a:cs typeface="+mn-cs"/>
                 </a:rPr>
-                <a:t>三 </a:t>
+                <a:t>三</a:t>
+              </a:r>
+              <a:r>
+                <a:rPr lang="en-US" altLang="zh-CN" sz="1280" b="1" dirty="0">
+                  <a:solidFill>
+                    <a:schemeClr val="accent2"/>
+                  </a:solidFill>
+                </a:rPr>
+                <a:t> </a:t>
               </a:r>
               <a:r>
                 <a:rPr lang="zh-CN" altLang="en-US" sz="1280" b="1" dirty="0">
                   <a:solidFill>
                     <a:schemeClr val="accent2"/>
                   </a:solidFill>
-                </a:rPr>
-                <a:t>空位只靠</a:t>
-              </a:r>
-              <a:r>
-                <a:rPr lang="en-US" altLang="zh-CN" sz="1280" b="1" dirty="0">
-                  <a:solidFill>
-                    <a:schemeClr val="accent2"/>
-                  </a:solidFill>
-                </a:rPr>
-                <a:t>CIF</a:t>
-              </a:r>
-              <a:r>
-                <a:rPr lang="zh-CN" altLang="en-US" sz="1280" b="1" dirty="0">
-                  <a:solidFill>
-                    <a:schemeClr val="accent2"/>
-                  </a:solidFill>
-                </a:rPr>
-                <a:t>占位</a:t>
+                  <a:latin typeface="+mn-lt"/>
+                  <a:ea typeface="+mn-ea"/>
+                  <a:cs typeface="+mn-cs"/>
+                </a:rPr>
+                <a:t>无物理意义组合描述符</a:t>
               </a:r>
               <a:endParaRPr lang="zh-CN" sz="1280" b="1" dirty="0">
                 <a:solidFill>
@@ -9094,74 +8983,31 @@
           <p:spPr>
             <a:xfrm>
               <a:off x="8223504" y="3870960"/>
-              <a:ext cx="819912" cy="234696"/>
-            </a:xfrm>
-            <a:prstGeom prst="rect">
-              <a:avLst/>
-            </a:prstGeom>
-            <a:noFill/>
-            <a:ln>
-              <a:noFill/>
-            </a:ln>
-          </p:spPr>
-          <p:txBody>
-            <a:bodyPr wrap="none" lIns="0" tIns="0" rIns="0" bIns="0" anchor="t" anchorCtr="0">
-              <a:spAutoFit/>
-            </a:bodyPr>
-            <a:lstStyle/>
-            <a:p>
-              <a:pPr algn="l"/>
-              <a:r>
-                <a:rPr lang="zh-CN" sz="1200" dirty="0">
-                  <a:solidFill>
-                    <a:schemeClr val="accent3"/>
-                  </a:solidFill>
-                  <a:latin typeface="+mn-lt"/>
-                  <a:ea typeface="+mn-ea"/>
-                  <a:cs typeface="+mn-cs"/>
-                </a:rPr>
-                <a:t>阈值已冻结</a:t>
-              </a:r>
-            </a:p>
-          </p:txBody>
-        </p:sp>
-        <p:sp>
-          <p:nvSpPr>
-            <p:cNvPr id="33" name="TextBox 33"/>
-            <p:cNvSpPr txBox="1"/>
-            <p:nvPr/>
-          </p:nvSpPr>
-          <p:spPr>
-            <a:xfrm>
-              <a:off x="8224266" y="4115752"/>
-              <a:ext cx="1848231" cy="205359"/>
-            </a:xfrm>
-            <a:prstGeom prst="rect">
-              <a:avLst/>
-            </a:prstGeom>
-            <a:noFill/>
-            <a:ln>
-              <a:noFill/>
-            </a:ln>
-          </p:spPr>
-          <p:txBody>
-            <a:bodyPr wrap="none" lIns="0" tIns="0" rIns="0" bIns="0" anchor="t" anchorCtr="0">
-              <a:spAutoFit/>
-            </a:bodyPr>
-            <a:lstStyle/>
-            <a:p>
-              <a:pPr algn="l"/>
-              <a:r>
-                <a:rPr lang="zh-CN" sz="1050" dirty="0">
-                  <a:solidFill>
-                    <a:schemeClr val="accent2"/>
-                  </a:solidFill>
-                  <a:latin typeface="+mn-lt"/>
-                  <a:ea typeface="+mn-ea"/>
-                  <a:cs typeface="+mn-cs"/>
-                </a:rPr>
-                <a:t>留一体系验证被删，必须补回</a:t>
-              </a:r>
+              <a:ext cx="65" cy="184666"/>
+            </a:xfrm>
+            <a:prstGeom prst="rect">
+              <a:avLst/>
+            </a:prstGeom>
+            <a:noFill/>
+            <a:ln>
+              <a:noFill/>
+            </a:ln>
+          </p:spPr>
+          <p:txBody>
+            <a:bodyPr wrap="none" lIns="0" tIns="0" rIns="0" bIns="0" anchor="t" anchorCtr="0">
+              <a:spAutoFit/>
+            </a:bodyPr>
+            <a:lstStyle/>
+            <a:p>
+              <a:pPr algn="l"/>
+              <a:endParaRPr lang="zh-CN" sz="1200" dirty="0">
+                <a:solidFill>
+                  <a:schemeClr val="accent3"/>
+                </a:solidFill>
+                <a:latin typeface="+mn-lt"/>
+                <a:ea typeface="+mn-ea"/>
+                <a:cs typeface="+mn-cs"/>
+              </a:endParaRPr>
             </a:p>
           </p:txBody>
         </p:sp>
@@ -9231,7 +9077,7 @@
           </p:nvSpPr>
           <p:spPr>
             <a:xfrm>
-              <a:off x="603123" y="4510564"/>
+              <a:off x="603123" y="4574476"/>
               <a:ext cx="1679947" cy="196977"/>
             </a:xfrm>
             <a:prstGeom prst="rect">
@@ -9313,25 +9159,25 @@
           <p:spPr>
             <a:xfrm>
               <a:off x="3575304" y="4518660"/>
-              <a:ext cx="1966874" cy="234696"/>
-            </a:xfrm>
-            <a:prstGeom prst="rect">
-              <a:avLst/>
-            </a:prstGeom>
-            <a:noFill/>
-            <a:ln>
-              <a:noFill/>
-            </a:ln>
-          </p:spPr>
-          <p:txBody>
-            <a:bodyPr wrap="none" lIns="0" tIns="0" rIns="0" bIns="0" anchor="t" anchorCtr="0">
-              <a:spAutoFit/>
-            </a:bodyPr>
-            <a:lstStyle/>
-            <a:p>
-              <a:pPr algn="l"/>
-              <a:r>
-                <a:rPr lang="zh-CN" sz="1200" dirty="0">
+              <a:ext cx="3106620" cy="184666"/>
+            </a:xfrm>
+            <a:prstGeom prst="rect">
+              <a:avLst/>
+            </a:prstGeom>
+            <a:noFill/>
+            <a:ln>
+              <a:noFill/>
+            </a:ln>
+          </p:spPr>
+          <p:txBody>
+            <a:bodyPr wrap="none" lIns="0" tIns="0" rIns="0" bIns="0" anchor="t" anchorCtr="0">
+              <a:spAutoFit/>
+            </a:bodyPr>
+            <a:lstStyle/>
+            <a:p>
+              <a:pPr algn="l"/>
+              <a:r>
+                <a:rPr lang="zh-CN" altLang="en-US" sz="1200" dirty="0">
                   <a:solidFill>
                     <a:schemeClr val="dk1"/>
                   </a:solidFill>
@@ -9339,8 +9185,49 @@
                   <a:ea typeface="+mn-ea"/>
                   <a:cs typeface="+mn-cs"/>
                 </a:rPr>
-                <a:t>给每个描述符建“身份证”；</a:t>
-              </a:r>
+                <a:t>第一代只对 </a:t>
+              </a:r>
+              <a:r>
+                <a:rPr lang="en-US" altLang="zh-CN" sz="1200" dirty="0">
+                  <a:solidFill>
+                    <a:schemeClr val="dk1"/>
+                  </a:solidFill>
+                  <a:latin typeface="+mn-lt"/>
+                  <a:ea typeface="+mn-ea"/>
+                  <a:cs typeface="+mn-cs"/>
+                </a:rPr>
+                <a:t>8 </a:t>
+              </a:r>
+              <a:r>
+                <a:rPr lang="zh-CN" altLang="en-US" sz="1200" dirty="0">
+                  <a:solidFill>
+                    <a:schemeClr val="dk1"/>
+                  </a:solidFill>
+                  <a:latin typeface="+mn-lt"/>
+                  <a:ea typeface="+mn-ea"/>
+                  <a:cs typeface="+mn-cs"/>
+                </a:rPr>
+                <a:t>个候选做了单变量 </a:t>
+              </a:r>
+              <a:r>
+                <a:rPr lang="en-US" altLang="zh-CN" sz="1200" dirty="0">
+                  <a:solidFill>
+                    <a:schemeClr val="dk1"/>
+                  </a:solidFill>
+                  <a:latin typeface="+mn-lt"/>
+                  <a:ea typeface="+mn-ea"/>
+                  <a:cs typeface="+mn-cs"/>
+                </a:rPr>
+                <a:t>LOFO/LOAO</a:t>
+              </a:r>
+              <a:endParaRPr lang="zh-CN" sz="1200" dirty="0">
+                <a:solidFill>
+                  <a:schemeClr val="dk1"/>
+                </a:solidFill>
+                <a:latin typeface="+mn-lt"/>
+                <a:ea typeface="+mn-ea"/>
+                <a:cs typeface="+mn-cs"/>
+              </a:endParaRPr>
             </a:p>
           </p:txBody>
         </p:sp>
@@ -9353,34 +9240,38 @@
           <p:spPr>
             <a:xfrm>
               <a:off x="3575304" y="4747260"/>
-              <a:ext cx="2112264" cy="234696"/>
-            </a:xfrm>
-            <a:prstGeom prst="rect">
-              <a:avLst/>
-            </a:prstGeom>
-            <a:noFill/>
-            <a:ln>
-              <a:noFill/>
-            </a:ln>
-          </p:spPr>
-          <p:txBody>
-            <a:bodyPr wrap="none" lIns="0" tIns="0" rIns="0" bIns="0" anchor="t" anchorCtr="0">
-              <a:spAutoFit/>
-            </a:bodyPr>
-            <a:lstStyle/>
-            <a:p>
-              <a:pPr algn="l"/>
-              <a:r>
-                <a:rPr lang="zh-CN" sz="1200" dirty="0">
-                  <a:solidFill>
-                    <a:schemeClr val="dk1"/>
-                  </a:solidFill>
-                  <a:latin typeface="+mn-lt"/>
-                  <a:ea typeface="+mn-ea"/>
-                  <a:cs typeface="+mn-cs"/>
-                </a:rPr>
-                <a:t>七种等价写法探针看值变不变</a:t>
-              </a:r>
+              <a:ext cx="2308324" cy="184666"/>
+            </a:xfrm>
+            <a:prstGeom prst="rect">
+              <a:avLst/>
+            </a:prstGeom>
+            <a:noFill/>
+            <a:ln>
+              <a:noFill/>
+            </a:ln>
+          </p:spPr>
+          <p:txBody>
+            <a:bodyPr wrap="none" lIns="0" tIns="0" rIns="0" bIns="0" anchor="t" anchorCtr="0">
+              <a:spAutoFit/>
+            </a:bodyPr>
+            <a:lstStyle/>
+            <a:p>
+              <a:pPr algn="l"/>
+              <a:r>
+                <a:rPr lang="zh-CN" altLang="en-US" sz="1200" b="0" i="0" dirty="0">
+                  <a:effectLst/>
+                  <a:latin typeface="SF Pro Text"/>
+                </a:rPr>
+                <a:t>每个体系内打乱标签算统计显著性</a:t>
+              </a:r>
+              <a:endParaRPr lang="zh-CN" sz="1200" dirty="0">
+                <a:solidFill>
+                  <a:schemeClr val="dk1"/>
+                </a:solidFill>
+                <a:latin typeface="+mn-lt"/>
+                <a:ea typeface="+mn-ea"/>
+                <a:cs typeface="+mn-cs"/>
+              </a:endParaRPr>
             </a:p>
           </p:txBody>
         </p:sp>
@@ -9393,25 +9284,25 @@
           <p:spPr>
             <a:xfrm>
               <a:off x="8223504" y="4518660"/>
-              <a:ext cx="2152650" cy="234696"/>
-            </a:xfrm>
-            <a:prstGeom prst="rect">
-              <a:avLst/>
-            </a:prstGeom>
-            <a:noFill/>
-            <a:ln>
-              <a:noFill/>
-            </a:ln>
-          </p:spPr>
-          <p:txBody>
-            <a:bodyPr wrap="none" lIns="0" tIns="0" rIns="0" bIns="0" anchor="t" anchorCtr="0">
-              <a:spAutoFit/>
-            </a:bodyPr>
-            <a:lstStyle/>
-            <a:p>
-              <a:pPr algn="l"/>
-              <a:r>
-                <a:rPr lang="zh-CN" sz="1200" dirty="0">
+              <a:ext cx="2393284" cy="553998"/>
+            </a:xfrm>
+            <a:prstGeom prst="rect">
+              <a:avLst/>
+            </a:prstGeom>
+            <a:noFill/>
+            <a:ln>
+              <a:noFill/>
+            </a:ln>
+          </p:spPr>
+          <p:txBody>
+            <a:bodyPr wrap="none" lIns="0" tIns="0" rIns="0" bIns="0" anchor="t" anchorCtr="0">
+              <a:spAutoFit/>
+            </a:bodyPr>
+            <a:lstStyle/>
+            <a:p>
+              <a:pPr algn="l"/>
+              <a:r>
+                <a:rPr lang="zh-CN" altLang="en-US" sz="1200" dirty="0">
                   <a:solidFill>
                     <a:schemeClr val="accent3"/>
                   </a:solidFill>
@@ -9419,8 +9310,71 @@
                   <a:ea typeface="+mn-ea"/>
                   <a:cs typeface="+mn-cs"/>
                 </a:rPr>
-                <a:t>41 个已登记、7 种探针已实现</a:t>
-              </a:r>
+                <a:t>打乱样本重组，组内少于</a:t>
+              </a:r>
+              <a:r>
+                <a:rPr lang="en-US" altLang="zh-CN" sz="1200" dirty="0">
+                  <a:solidFill>
+                    <a:schemeClr val="accent3"/>
+                  </a:solidFill>
+                  <a:latin typeface="+mn-lt"/>
+                  <a:ea typeface="+mn-ea"/>
+                  <a:cs typeface="+mn-cs"/>
+                </a:rPr>
+                <a:t>5</a:t>
+              </a:r>
+              <a:r>
+                <a:rPr lang="zh-CN" altLang="en-US" sz="1200" dirty="0">
+                  <a:solidFill>
+                    <a:schemeClr val="accent3"/>
+                  </a:solidFill>
+                  <a:latin typeface="+mn-lt"/>
+                  <a:ea typeface="+mn-ea"/>
+                  <a:cs typeface="+mn-cs"/>
+                </a:rPr>
+                <a:t>个样本的</a:t>
+              </a:r>
+              <a:endParaRPr lang="en-US" altLang="zh-CN" sz="1200" dirty="0">
+                <a:solidFill>
+                  <a:schemeClr val="accent3"/>
+                </a:solidFill>
+                <a:latin typeface="+mn-lt"/>
+                <a:ea typeface="+mn-ea"/>
+                <a:cs typeface="+mn-cs"/>
+              </a:endParaRPr>
+            </a:p>
+            <a:p>
+              <a:pPr algn="l"/>
+              <a:r>
+                <a:rPr lang="zh-CN" altLang="en-US" sz="1200" dirty="0">
+                  <a:solidFill>
+                    <a:schemeClr val="accent3"/>
+                  </a:solidFill>
+                  <a:latin typeface="+mn-lt"/>
+                  <a:ea typeface="+mn-ea"/>
+                  <a:cs typeface="+mn-cs"/>
+                </a:rPr>
+                <a:t>不报这个体系的结果</a:t>
+              </a:r>
+              <a:endParaRPr lang="en-US" altLang="zh-CN" sz="1200" dirty="0">
+                <a:solidFill>
+                  <a:schemeClr val="accent3"/>
+                </a:solidFill>
+                <a:latin typeface="+mn-lt"/>
+                <a:ea typeface="+mn-ea"/>
+                <a:cs typeface="+mn-cs"/>
+              </a:endParaRPr>
+            </a:p>
+            <a:p>
+              <a:pPr algn="l"/>
+              <a:endParaRPr lang="zh-CN" sz="1200" dirty="0">
+                <a:solidFill>
+                  <a:schemeClr val="accent3"/>
+                </a:solidFill>
+                <a:latin typeface="+mn-lt"/>
+                <a:ea typeface="+mn-ea"/>
+                <a:cs typeface="+mn-cs"/>
+              </a:endParaRPr>
             </a:p>
           </p:txBody>
         </p:sp>
@@ -9433,34 +9387,31 @@
           <p:spPr>
             <a:xfrm>
               <a:off x="8224266" y="4763452"/>
-              <a:ext cx="1417110" cy="205359"/>
-            </a:xfrm>
-            <a:prstGeom prst="rect">
-              <a:avLst/>
-            </a:prstGeom>
-            <a:noFill/>
-            <a:ln>
-              <a:noFill/>
-            </a:ln>
-          </p:spPr>
-          <p:txBody>
-            <a:bodyPr wrap="none" lIns="0" tIns="0" rIns="0" bIns="0" anchor="t" anchorCtr="0">
-              <a:spAutoFit/>
-            </a:bodyPr>
-            <a:lstStyle/>
-            <a:p>
-              <a:pPr algn="l"/>
-              <a:r>
-                <a:rPr lang="zh-CN" sz="1050" dirty="0">
-                  <a:solidFill>
-                    <a:schemeClr val="accent2"/>
-                  </a:solidFill>
-                  <a:latin typeface="+mn-lt"/>
-                  <a:ea typeface="+mn-ea"/>
-                  <a:cs typeface="+mn-cs"/>
-                </a:rPr>
-                <a:t>205 处身份字段未查完</a:t>
-              </a:r>
+              <a:ext cx="65" cy="161583"/>
+            </a:xfrm>
+            <a:prstGeom prst="rect">
+              <a:avLst/>
+            </a:prstGeom>
+            <a:noFill/>
+            <a:ln>
+              <a:noFill/>
+            </a:ln>
+          </p:spPr>
+          <p:txBody>
+            <a:bodyPr wrap="none" lIns="0" tIns="0" rIns="0" bIns="0" anchor="t" anchorCtr="0">
+              <a:spAutoFit/>
+            </a:bodyPr>
+            <a:lstStyle/>
+            <a:p>
+              <a:pPr algn="l"/>
+              <a:endParaRPr lang="zh-CN" sz="1050" dirty="0">
+                <a:solidFill>
+                  <a:schemeClr val="accent2"/>
+                </a:solidFill>
+                <a:latin typeface="+mn-lt"/>
+                <a:ea typeface="+mn-ea"/>
+                <a:cs typeface="+mn-cs"/>
+              </a:endParaRPr>
             </a:p>
           </p:txBody>
         </p:sp>
@@ -9588,72 +9539,40 @@
         </p:sp>
         <p:sp>
           <p:nvSpPr>
-            <p:cNvPr id="44" name="TextBox 44"/>
-            <p:cNvSpPr txBox="1"/>
-            <p:nvPr/>
-          </p:nvSpPr>
-          <p:spPr>
-            <a:xfrm>
-              <a:off x="3575304" y="5166360"/>
-              <a:ext cx="2128418" cy="234696"/>
-            </a:xfrm>
-            <a:prstGeom prst="rect">
-              <a:avLst/>
-            </a:prstGeom>
-            <a:noFill/>
-            <a:ln>
-              <a:noFill/>
-            </a:ln>
-          </p:spPr>
-          <p:txBody>
-            <a:bodyPr wrap="none" lIns="0" tIns="0" rIns="0" bIns="0" anchor="t" anchorCtr="0">
-              <a:spAutoFit/>
-            </a:bodyPr>
-            <a:lstStyle/>
-            <a:p>
-              <a:pPr algn="l"/>
-              <a:r>
-                <a:rPr lang="zh-CN" sz="1200" dirty="0">
+            <p:cNvPr id="45" name="TextBox 45"/>
+            <p:cNvSpPr txBox="1"/>
+            <p:nvPr/>
+          </p:nvSpPr>
+          <p:spPr>
+            <a:xfrm>
+              <a:off x="3575304" y="5184576"/>
+              <a:ext cx="1077218" cy="184666"/>
+            </a:xfrm>
+            <a:prstGeom prst="rect">
+              <a:avLst/>
+            </a:prstGeom>
+            <a:noFill/>
+            <a:ln>
+              <a:noFill/>
+            </a:ln>
+          </p:spPr>
+          <p:txBody>
+            <a:bodyPr wrap="none" lIns="0" tIns="0" rIns="0" bIns="0" anchor="t" anchorCtr="0">
+              <a:spAutoFit/>
+            </a:bodyPr>
+            <a:lstStyle/>
+            <a:p>
+              <a:pPr algn="l"/>
+              <a:r>
+                <a:rPr lang="zh-CN" altLang="en-US" sz="1200" dirty="0">
                   <a:solidFill>
                     <a:schemeClr val="dk1"/>
                   </a:solidFill>
-                  <a:latin typeface="+mn-lt"/>
-                  <a:ea typeface="+mn-ea"/>
-                  <a:cs typeface="+mn-cs"/>
-                </a:rPr>
-                <a:t>分四层：几何空腔→键价能垒→</a:t>
-              </a:r>
-            </a:p>
-          </p:txBody>
-        </p:sp>
-        <p:sp>
-          <p:nvSpPr>
-            <p:cNvPr id="45" name="TextBox 45"/>
-            <p:cNvSpPr txBox="1"/>
-            <p:nvPr/>
-          </p:nvSpPr>
-          <p:spPr>
-            <a:xfrm>
-              <a:off x="3575304" y="5394960"/>
-              <a:ext cx="2201113" cy="234696"/>
-            </a:xfrm>
-            <a:prstGeom prst="rect">
-              <a:avLst/>
-            </a:prstGeom>
-            <a:noFill/>
-            <a:ln>
-              <a:noFill/>
-            </a:ln>
-          </p:spPr>
-          <p:txBody>
-            <a:bodyPr wrap="none" lIns="0" tIns="0" rIns="0" bIns="0" anchor="t" anchorCtr="0">
-              <a:spAutoFit/>
-            </a:bodyPr>
-            <a:lstStyle/>
-            <a:p>
-              <a:pPr algn="l"/>
-              <a:r>
-                <a:rPr lang="zh-CN" sz="1200" dirty="0">
+                </a:rPr>
+                <a:t>添加</a:t>
+              </a:r>
+              <a:r>
+                <a:rPr lang="zh-CN" altLang="en-US" sz="1200" dirty="0">
                   <a:solidFill>
                     <a:schemeClr val="dk1"/>
                   </a:solidFill>
@@ -9661,8 +9580,16 @@
                   <a:ea typeface="+mn-ea"/>
                   <a:cs typeface="+mn-cs"/>
                 </a:rPr>
-                <a:t>密度泛函计算→分子动力学模拟</a:t>
-              </a:r>
+                <a:t>新的描述符</a:t>
+              </a:r>
+              <a:endParaRPr lang="zh-CN" sz="1200" dirty="0">
+                <a:solidFill>
+                  <a:schemeClr val="dk1"/>
+                </a:solidFill>
+                <a:latin typeface="+mn-lt"/>
+                <a:ea typeface="+mn-ea"/>
+                <a:cs typeface="+mn-cs"/>
+              </a:endParaRPr>
             </a:p>
           </p:txBody>
         </p:sp>
@@ -9842,6 +9769,65 @@
           </p:txBody>
         </p:sp>
       </p:grpSp>
+      <p:sp>
+        <p:nvSpPr>
+          <p:cNvPr id="54" name="TextBox 26">
+            <a:extLst>
+              <a:ext uri="{FF2B5EF4-FFF2-40B4-BE49-F238E27FC236}">
+                <a16:creationId xmlns:a16="http://schemas.microsoft.com/office/drawing/2014/main" id="{8099AFE7-7351-8819-DF3A-90A689CC07CB}"/>
+              </a:ext>
+            </a:extLst>
+          </p:cNvPr>
+          <p:cNvSpPr txBox="1"/>
+          <p:nvPr/>
+        </p:nvSpPr>
+        <p:spPr>
+          <a:xfrm>
+            <a:off x="8224331" y="3641466"/>
+            <a:ext cx="2111437" cy="369332"/>
+          </a:xfrm>
+          <a:prstGeom prst="rect">
+            <a:avLst/>
+          </a:prstGeom>
+          <a:noFill/>
+          <a:ln>
+            <a:noFill/>
+          </a:ln>
+        </p:spPr>
+        <p:txBody>
+          <a:bodyPr wrap="square" lIns="0" tIns="0" rIns="0" bIns="0" anchor="t" anchorCtr="0">
+            <a:spAutoFit/>
+          </a:bodyPr>
+          <a:lstStyle/>
+          <a:p>
+            <a:pPr algn="l"/>
+            <a:r>
+              <a:rPr lang="zh-CN" altLang="en-US" sz="1200" dirty="0">
+                <a:solidFill>
+                  <a:schemeClr val="accent3"/>
+                </a:solidFill>
+              </a:rPr>
+              <a:t>把描述符按材料意义分组</a:t>
+            </a:r>
+            <a:endParaRPr lang="en-US" altLang="zh-CN" sz="1200" dirty="0">
+              <a:solidFill>
+                <a:schemeClr val="accent3"/>
+              </a:solidFill>
+            </a:endParaRPr>
+          </a:p>
+          <a:p>
+            <a:pPr algn="l"/>
+            <a:r>
+              <a:rPr lang="zh-CN" altLang="en-US" sz="1200" dirty="0">
+                <a:solidFill>
+                  <a:schemeClr val="accent3"/>
+                </a:solidFill>
+              </a:rPr>
+              <a:t>只允许有物理意义的组合</a:t>
+            </a:r>
+          </a:p>
+        </p:txBody>
+      </p:sp>
     </p:spTree>
   </p:cSld>
   <p:clrMapOvr>
@@ -10887,7 +10873,7 @@
           </p:nvSpPr>
           <p:spPr>
             <a:xfrm>
-              <a:off x="4261104" y="3947160"/>
+              <a:off x="4255008" y="4063746"/>
               <a:ext cx="1143000" cy="234696"/>
             </a:xfrm>
             <a:prstGeom prst="rect">
